--- a/极印版 aiken/销量概率模型/销量概率分布模型介绍.pptx
+++ b/极印版 aiken/销量概率模型/销量概率分布模型介绍.pptx
@@ -15228,19 +15228,16 @@
           <a:lstStyle/>
           <a:p>
             <a:r>
-              <a:rPr lang="en-US" altLang="zh-CN" sz="6000" dirty="0" err="1">
+              <a:rPr lang="zh-CN" altLang="en-US" sz="6000" dirty="0">
                 <a:latin typeface="+mj-ea"/>
                 <a:ea typeface="+mj-ea"/>
               </a:rPr>
-              <a:t>AiKen</a:t>
+              <a:t>销量概率分布模型</a:t>
             </a:r>
-            <a:r>
-              <a:rPr lang="en-US" altLang="zh-CN" sz="6000" dirty="0">
-                <a:latin typeface="+mj-ea"/>
-                <a:ea typeface="+mj-ea"/>
-              </a:rPr>
-              <a:t> JY SI/DO</a:t>
-            </a:r>
+            <a:endParaRPr lang="en-US" altLang="zh-CN" sz="6000" dirty="0">
+              <a:latin typeface="+mj-ea"/>
+              <a:ea typeface="+mj-ea"/>
+            </a:endParaRPr>
           </a:p>
         </p:txBody>
       </p:sp>
@@ -15299,7 +15296,7 @@
                 <a:latin typeface="+mj-ea"/>
                 <a:ea typeface="+mj-ea"/>
               </a:rPr>
-              <a:t>2026/10/27</a:t>
+              <a:t>26 Oct</a:t>
             </a:r>
           </a:p>
         </p:txBody>
@@ -19219,7 +19216,7 @@
     </a:fmtScheme>
     <a:extLst>
       <a:ext uri="{D81B5157-A7B6-4480-A006-42BB1BC3E7BB}">
-        <wpsdc:hlinkScheme xmlns:wpsdc="http://www.wps.cn/officeDocument/2017/drawingmlCustomData" xmlns="" underline="false"/>
+        <wpsdc:hlinkScheme xmlns="" xmlns:wpsdc="http://www.wps.cn/officeDocument/2017/drawingmlCustomData" underline="false"/>
       </a:ext>
     </a:extLst>
   </a:themeElements>

--- a/极印版 aiken/销量概率模型/销量概率分布模型介绍.pptx
+++ b/极印版 aiken/销量概率模型/销量概率分布模型介绍.pptx
@@ -6,13 +6,15 @@
     <p:sldMasterId id="2147483676" r:id="rId2"/>
   </p:sldMasterIdLst>
   <p:notesMasterIdLst>
-    <p:notesMasterId r:id="rId7"/>
+    <p:notesMasterId r:id="rId9"/>
   </p:notesMasterIdLst>
   <p:sldIdLst>
     <p:sldId id="257" r:id="rId3"/>
     <p:sldId id="15742572" r:id="rId4"/>
-    <p:sldId id="15742579" r:id="rId5"/>
-    <p:sldId id="15742580" r:id="rId6"/>
+    <p:sldId id="15742581" r:id="rId5"/>
+    <p:sldId id="15742579" r:id="rId6"/>
+    <p:sldId id="15742580" r:id="rId7"/>
+    <p:sldId id="15742582" r:id="rId8"/>
   </p:sldIdLst>
   <p:sldSz cx="12192000" cy="6858000"/>
   <p:notesSz cx="6858000" cy="9144000"/>
@@ -537,12 +539,45 @@
         <c:scaling>
           <c:orientation val="minMax"/>
         </c:scaling>
-        <c:delete val="1"/>
+        <c:delete val="0"/>
         <c:axPos val="b"/>
         <c:numFmt formatCode="General" sourceLinked="1"/>
-        <c:majorTickMark val="none"/>
+        <c:majorTickMark val="out"/>
         <c:minorTickMark val="none"/>
         <c:tickLblPos val="nextTo"/>
+        <c:spPr>
+          <a:noFill/>
+          <a:ln w="9525" cap="flat" cmpd="sng" algn="ctr">
+            <a:solidFill>
+              <a:schemeClr val="tx1">
+                <a:lumMod val="15000"/>
+                <a:lumOff val="85000"/>
+              </a:schemeClr>
+            </a:solidFill>
+            <a:round/>
+          </a:ln>
+          <a:effectLst/>
+        </c:spPr>
+        <c:txPr>
+          <a:bodyPr rot="-60000000" spcFirstLastPara="1" vertOverflow="ellipsis" vert="horz" wrap="square" anchor="ctr" anchorCtr="1"/>
+          <a:lstStyle/>
+          <a:p>
+            <a:pPr>
+              <a:defRPr sz="1197" b="0" i="0" u="none" strike="noStrike" kern="1200" baseline="0">
+                <a:solidFill>
+                  <a:schemeClr val="tx1">
+                    <a:lumMod val="65000"/>
+                    <a:lumOff val="35000"/>
+                  </a:schemeClr>
+                </a:solidFill>
+                <a:latin typeface="+mn-lt"/>
+                <a:ea typeface="+mn-ea"/>
+                <a:cs typeface="+mn-cs"/>
+              </a:defRPr>
+            </a:pPr>
+            <a:endParaRPr lang="zh-CN"/>
+          </a:p>
+        </c:txPr>
         <c:crossAx val="1159851535"/>
         <c:crosses val="autoZero"/>
         <c:auto val="1"/>
@@ -555,7 +590,7 @@
         <c:scaling>
           <c:orientation val="minMax"/>
         </c:scaling>
-        <c:delete val="1"/>
+        <c:delete val="0"/>
         <c:axPos val="l"/>
         <c:majorGridlines>
           <c:spPr>
@@ -572,9 +607,36 @@
           </c:spPr>
         </c:majorGridlines>
         <c:numFmt formatCode="General" sourceLinked="1"/>
-        <c:majorTickMark val="none"/>
+        <c:majorTickMark val="out"/>
         <c:minorTickMark val="none"/>
         <c:tickLblPos val="nextTo"/>
+        <c:spPr>
+          <a:noFill/>
+          <a:ln>
+            <a:noFill/>
+          </a:ln>
+          <a:effectLst/>
+        </c:spPr>
+        <c:txPr>
+          <a:bodyPr rot="-60000000" spcFirstLastPara="1" vertOverflow="ellipsis" vert="horz" wrap="square" anchor="ctr" anchorCtr="1"/>
+          <a:lstStyle/>
+          <a:p>
+            <a:pPr>
+              <a:defRPr sz="1197" b="0" i="0" u="none" strike="noStrike" kern="1200" baseline="0">
+                <a:solidFill>
+                  <a:schemeClr val="tx1">
+                    <a:lumMod val="65000"/>
+                    <a:lumOff val="35000"/>
+                  </a:schemeClr>
+                </a:solidFill>
+                <a:latin typeface="+mn-lt"/>
+                <a:ea typeface="+mn-ea"/>
+                <a:cs typeface="+mn-cs"/>
+              </a:defRPr>
+            </a:pPr>
+            <a:endParaRPr lang="zh-CN"/>
+          </a:p>
+        </c:txPr>
         <c:crossAx val="1169301023"/>
         <c:crosses val="autoZero"/>
         <c:crossBetween val="between"/>
@@ -15385,12 +15447,279 @@
           </a:p>
         </p:txBody>
       </p:sp>
+      <p:sp>
+        <p:nvSpPr>
+          <p:cNvPr id="5" name="TextBox 7">
+            <a:extLst>
+              <a:ext uri="{FF2B5EF4-FFF2-40B4-BE49-F238E27FC236}">
+                <a16:creationId xmlns:a16="http://schemas.microsoft.com/office/drawing/2014/main" id="{9CAAB2C7-14AA-256B-ED05-1495E5D4B833}"/>
+              </a:ext>
+            </a:extLst>
+          </p:cNvPr>
+          <p:cNvSpPr txBox="1"/>
+          <p:nvPr>
+            <p:custDataLst>
+              <p:tags r:id="rId1"/>
+            </p:custDataLst>
+          </p:nvPr>
+        </p:nvSpPr>
+        <p:spPr>
+          <a:xfrm>
+            <a:off x="2703890" y="5242196"/>
+            <a:ext cx="6784221" cy="419795"/>
+          </a:xfrm>
+          <a:prstGeom prst="rect">
+            <a:avLst/>
+          </a:prstGeom>
+          <a:noFill/>
+        </p:spPr>
+        <p:txBody>
+          <a:bodyPr wrap="square">
+            <a:spAutoFit/>
+          </a:bodyPr>
+          <a:lstStyle/>
+          <a:p>
+            <a:pPr algn="l">
+              <a:lnSpc>
+                <a:spcPct val="150000"/>
+              </a:lnSpc>
+              <a:defRPr sz="1400" b="0">
+                <a:solidFill>
+                  <a:srgbClr val="CCCCCC"/>
+                </a:solidFill>
+                <a:latin typeface="微软雅黑" panose="020B0503020204020204" charset="-122"/>
+              </a:defRPr>
+            </a:pPr>
+            <a:r>
+              <a:rPr lang="en-US" altLang="zh-CN" sz="1600" dirty="0">
+                <a:solidFill>
+                  <a:srgbClr val="000000"/>
+                </a:solidFill>
+                <a:latin typeface="+mn-ea"/>
+              </a:rPr>
+              <a:t>2024</a:t>
+            </a:r>
+            <a:r>
+              <a:rPr lang="zh-CN" altLang="en-US" sz="1600" dirty="0">
+                <a:solidFill>
+                  <a:srgbClr val="000000"/>
+                </a:solidFill>
+                <a:latin typeface="+mn-ea"/>
+              </a:rPr>
+              <a:t>年</a:t>
+            </a:r>
+            <a:r>
+              <a:rPr lang="en-US" altLang="zh-CN" sz="1600" dirty="0">
+                <a:solidFill>
+                  <a:srgbClr val="000000"/>
+                </a:solidFill>
+                <a:latin typeface="+mn-ea"/>
+              </a:rPr>
+              <a:t>4</a:t>
+            </a:r>
+            <a:r>
+              <a:rPr lang="zh-CN" altLang="en-US" sz="1600" dirty="0">
+                <a:solidFill>
+                  <a:srgbClr val="000000"/>
+                </a:solidFill>
+                <a:latin typeface="+mn-ea"/>
+              </a:rPr>
+              <a:t>月，</a:t>
+            </a:r>
+            <a:r>
+              <a:rPr lang="en-US" altLang="zh-CN" sz="1600" dirty="0">
+                <a:solidFill>
+                  <a:srgbClr val="000000"/>
+                </a:solidFill>
+                <a:latin typeface="+mn-ea"/>
+              </a:rPr>
+              <a:t>Mint</a:t>
+            </a:r>
+            <a:r>
+              <a:rPr lang="zh-CN" altLang="en-US" sz="1600" dirty="0">
+                <a:solidFill>
+                  <a:srgbClr val="000000"/>
+                </a:solidFill>
+                <a:latin typeface="+mn-ea"/>
+              </a:rPr>
+              <a:t>项目 </a:t>
+            </a:r>
+            <a:r>
+              <a:rPr lang="en-US" altLang="zh-CN" sz="1600" dirty="0">
+                <a:solidFill>
+                  <a:srgbClr val="000000"/>
+                </a:solidFill>
+                <a:latin typeface="+mn-ea"/>
+              </a:rPr>
+              <a:t>MC</a:t>
+            </a:r>
+            <a:r>
+              <a:rPr lang="zh-CN" altLang="en-US" sz="1600" dirty="0">
+                <a:solidFill>
+                  <a:srgbClr val="000000"/>
+                </a:solidFill>
+                <a:latin typeface="+mn-ea"/>
+              </a:rPr>
+              <a:t>（市场承诺）</a:t>
+            </a:r>
+            <a:r>
+              <a:rPr lang="en-US" altLang="zh-CN" sz="1600" dirty="0">
+                <a:solidFill>
+                  <a:srgbClr val="000000"/>
+                </a:solidFill>
+                <a:latin typeface="+mn-ea"/>
+              </a:rPr>
+              <a:t> Checkpoint</a:t>
+            </a:r>
+            <a:r>
+              <a:rPr lang="zh-CN" altLang="en-US" sz="1600" dirty="0">
+                <a:solidFill>
+                  <a:srgbClr val="000000"/>
+                </a:solidFill>
+                <a:latin typeface="+mn-ea"/>
+              </a:rPr>
+              <a:t>时的三场景销量预测。</a:t>
+            </a:r>
+            <a:endParaRPr sz="1400" dirty="0">
+              <a:solidFill>
+                <a:srgbClr val="000000"/>
+              </a:solidFill>
+              <a:latin typeface="+mn-ea"/>
+            </a:endParaRPr>
+          </a:p>
+        </p:txBody>
+      </p:sp>
+      <p:pic>
+        <p:nvPicPr>
+          <p:cNvPr id="7" name="图片 6">
+            <a:extLst>
+              <a:ext uri="{FF2B5EF4-FFF2-40B4-BE49-F238E27FC236}">
+                <a16:creationId xmlns:a16="http://schemas.microsoft.com/office/drawing/2014/main" id="{2BA419A8-625D-A370-C0CA-38A1B1823986}"/>
+              </a:ext>
+            </a:extLst>
+          </p:cNvPr>
+          <p:cNvPicPr>
+            <a:picLocks noChangeAspect="1"/>
+          </p:cNvPicPr>
+          <p:nvPr/>
+        </p:nvPicPr>
+        <p:blipFill>
+          <a:blip r:embed="rId3"/>
+          <a:stretch>
+            <a:fillRect/>
+          </a:stretch>
+        </p:blipFill>
+        <p:spPr>
+          <a:xfrm>
+            <a:off x="3261078" y="1405906"/>
+            <a:ext cx="5669845" cy="3470894"/>
+          </a:xfrm>
+          <a:prstGeom prst="rect">
+            <a:avLst/>
+          </a:prstGeom>
+        </p:spPr>
+      </p:pic>
+    </p:spTree>
+    <p:extLst>
+      <p:ext uri="{BB962C8B-B14F-4D97-AF65-F5344CB8AC3E}">
+        <p14:creationId xmlns:p14="http://schemas.microsoft.com/office/powerpoint/2010/main" val="304221860"/>
+      </p:ext>
+    </p:extLst>
+  </p:cSld>
+  <p:clrMapOvr>
+    <a:masterClrMapping/>
+  </p:clrMapOvr>
+</p:sld>
+</file>
+
+<file path=ppt/slides/slide3.xml><?xml version="1.0" encoding="utf-8"?>
+<p:sld xmlns:a="http://schemas.openxmlformats.org/drawingml/2006/main" xmlns:r="http://schemas.openxmlformats.org/officeDocument/2006/relationships" xmlns:p="http://schemas.openxmlformats.org/presentationml/2006/main">
+  <p:cSld>
+    <p:spTree>
+      <p:nvGrpSpPr>
+        <p:cNvPr id="1" name="">
+          <a:extLst>
+            <a:ext uri="{FF2B5EF4-FFF2-40B4-BE49-F238E27FC236}">
+              <a16:creationId xmlns:a16="http://schemas.microsoft.com/office/drawing/2014/main" id="{69D43CEC-AD41-E719-813C-BF0B4B83ED9C}"/>
+            </a:ext>
+          </a:extLst>
+        </p:cNvPr>
+        <p:cNvGrpSpPr/>
+        <p:nvPr/>
+      </p:nvGrpSpPr>
+      <p:grpSpPr>
+        <a:xfrm>
+          <a:off x="0" y="0"/>
+          <a:ext cx="0" cy="0"/>
+          <a:chOff x="0" y="0"/>
+          <a:chExt cx="0" cy="0"/>
+        </a:xfrm>
+      </p:grpSpPr>
+      <p:sp>
+        <p:nvSpPr>
+          <p:cNvPr id="3" name="标题 1">
+            <a:extLst>
+              <a:ext uri="{FF2B5EF4-FFF2-40B4-BE49-F238E27FC236}">
+                <a16:creationId xmlns:a16="http://schemas.microsoft.com/office/drawing/2014/main" id="{64331E17-CA42-8945-1A06-EA74B2D67BF9}"/>
+              </a:ext>
+            </a:extLst>
+          </p:cNvPr>
+          <p:cNvSpPr txBox="1">
+            <a:spLocks/>
+          </p:cNvSpPr>
+          <p:nvPr/>
+        </p:nvSpPr>
+        <p:spPr>
+          <a:xfrm>
+            <a:off x="838200" y="510908"/>
+            <a:ext cx="4852610" cy="480131"/>
+          </a:xfrm>
+          <a:prstGeom prst="rect">
+            <a:avLst/>
+          </a:prstGeom>
+        </p:spPr>
+        <p:txBody>
+          <a:bodyPr wrap="none">
+            <a:spAutoFit/>
+          </a:bodyPr>
+          <a:lstStyle>
+            <a:lvl1pPr algn="l" defTabSz="914400" rtl="0" eaLnBrk="1" latinLnBrk="0" hangingPunct="1">
+              <a:lnSpc>
+                <a:spcPct val="90000"/>
+              </a:lnSpc>
+              <a:spcBef>
+                <a:spcPct val="0"/>
+              </a:spcBef>
+              <a:buNone/>
+              <a:defRPr sz="3200" kern="1200">
+                <a:solidFill>
+                  <a:schemeClr val="tx1"/>
+                </a:solidFill>
+                <a:latin typeface="Microsoft YaHei UI" panose="020B0503020204020204" pitchFamily="34" charset="-122"/>
+                <a:ea typeface="Microsoft YaHei UI" panose="020B0503020204020204" pitchFamily="34" charset="-122"/>
+                <a:cs typeface="+mj-cs"/>
+              </a:defRPr>
+            </a:lvl1pPr>
+          </a:lstStyle>
+          <a:p>
+            <a:r>
+              <a:rPr lang="zh-CN" altLang="en-US" sz="2800" dirty="0">
+                <a:latin typeface="+mn-lt"/>
+                <a:ea typeface="+mn-ea"/>
+                <a:cs typeface="+mn-ea"/>
+                <a:sym typeface="+mn-lt"/>
+              </a:rPr>
+              <a:t>你如何预测自己产品的销量？</a:t>
+            </a:r>
+          </a:p>
+        </p:txBody>
+      </p:sp>
       <p:graphicFrame>
         <p:nvGraphicFramePr>
           <p:cNvPr id="14" name="Table 5">
             <a:extLst>
               <a:ext uri="{FF2B5EF4-FFF2-40B4-BE49-F238E27FC236}">
-                <a16:creationId xmlns:a16="http://schemas.microsoft.com/office/drawing/2014/main" id="{6F51D40D-AFC0-4CC6-22E9-A28DFD9A4CD4}"/>
+                <a16:creationId xmlns:a16="http://schemas.microsoft.com/office/drawing/2014/main" id="{B02F474D-15DC-72DB-59D3-5507541D1292}"/>
               </a:ext>
             </a:extLst>
           </p:cNvPr>
@@ -15401,11 +15730,6 @@
             <p:custDataLst>
               <p:tags r:id="rId1"/>
             </p:custDataLst>
-            <p:extLst>
-              <p:ext uri="{D42A27DB-BD31-4B8C-83A1-F6EECF244321}">
-                <p14:modId xmlns:p14="http://schemas.microsoft.com/office/powerpoint/2010/main" val="3796693418"/>
-              </p:ext>
-            </p:extLst>
           </p:nvPr>
         </p:nvGraphicFramePr>
         <p:xfrm>
@@ -15722,7 +16046,7 @@
                           </a:solidFill>
                           <a:latin typeface="+mn-ea"/>
                         </a:rPr>
-                        <a:t>认知之外</a:t>
+                        <a:t>当时认知之外</a:t>
                       </a:r>
                     </a:p>
                   </a:txBody>
@@ -16479,7 +16803,7 @@
                           <a:latin typeface="微软雅黑" panose="020B0503020204020204" charset="-122"/>
                         </a:defRPr>
                       </a:pPr>
-                      <a:endParaRPr sz="1400">
+                      <a:endParaRPr sz="1400" dirty="0">
                         <a:solidFill>
                           <a:schemeClr val="tx1"/>
                         </a:solidFill>
@@ -16505,7 +16829,7 @@
                           <a:latin typeface="微软雅黑" panose="020B0503020204020204" charset="-122"/>
                         </a:defRPr>
                       </a:pPr>
-                      <a:endParaRPr sz="1400">
+                      <a:endParaRPr sz="1400" dirty="0">
                         <a:solidFill>
                           <a:schemeClr val="tx1"/>
                         </a:solidFill>
@@ -16657,7 +16981,7 @@
           <p:cNvPr id="4" name="TextBox 7">
             <a:extLst>
               <a:ext uri="{FF2B5EF4-FFF2-40B4-BE49-F238E27FC236}">
-                <a16:creationId xmlns:a16="http://schemas.microsoft.com/office/drawing/2014/main" id="{8B06D819-F841-706E-7C03-D9D52E002DF7}"/>
+                <a16:creationId xmlns:a16="http://schemas.microsoft.com/office/drawing/2014/main" id="{89477553-6C32-4157-53BB-30783ACD3FF3}"/>
               </a:ext>
             </a:extLst>
           </p:cNvPr>
@@ -16743,7 +17067,7 @@
     </p:spTree>
     <p:extLst>
       <p:ext uri="{BB962C8B-B14F-4D97-AF65-F5344CB8AC3E}">
-        <p14:creationId xmlns:p14="http://schemas.microsoft.com/office/powerpoint/2010/main" val="304221860"/>
+        <p14:creationId xmlns:p14="http://schemas.microsoft.com/office/powerpoint/2010/main" val="3100695485"/>
       </p:ext>
     </p:extLst>
   </p:cSld>
@@ -16753,7 +17077,7 @@
 </p:sld>
 </file>
 
-<file path=ppt/slides/slide3.xml><?xml version="1.0" encoding="utf-8"?>
+<file path=ppt/slides/slide4.xml><?xml version="1.0" encoding="utf-8"?>
 <p:sld xmlns:a="http://schemas.openxmlformats.org/drawingml/2006/main" xmlns:r="http://schemas.openxmlformats.org/officeDocument/2006/relationships" xmlns:p="http://schemas.openxmlformats.org/presentationml/2006/main">
   <p:cSld>
     <p:spTree>
@@ -17033,43 +17357,7 @@
                 </a:solidFill>
                 <a:latin typeface="+mn-ea"/>
               </a:rPr>
-              <a:t>挪多少，达成目标销量的概率从</a:t>
-            </a:r>
-            <a:r>
-              <a:rPr lang="en-US" altLang="zh-CN" sz="1600" dirty="0">
-                <a:solidFill>
-                  <a:srgbClr val="000000"/>
-                </a:solidFill>
-                <a:latin typeface="+mn-ea"/>
-              </a:rPr>
-              <a:t>10%</a:t>
-            </a:r>
-            <a:r>
-              <a:rPr lang="zh-CN" altLang="en-US" sz="1600" dirty="0">
-                <a:solidFill>
-                  <a:srgbClr val="000000"/>
-                </a:solidFill>
-                <a:latin typeface="+mn-ea"/>
-              </a:rPr>
-              <a:t>提到</a:t>
-            </a:r>
-            <a:r>
-              <a:rPr lang="en-US" altLang="zh-CN" sz="1600" dirty="0">
-                <a:solidFill>
-                  <a:srgbClr val="000000"/>
-                </a:solidFill>
-                <a:latin typeface="+mn-ea"/>
-              </a:rPr>
-              <a:t>45%</a:t>
-            </a:r>
-            <a:r>
-              <a:rPr lang="zh-CN" altLang="en-US" sz="1600" dirty="0">
-                <a:solidFill>
-                  <a:srgbClr val="000000"/>
-                </a:solidFill>
-                <a:latin typeface="+mn-ea"/>
-              </a:rPr>
-              <a:t>。预算有明码标价。</a:t>
+              <a:t>挪多少？达成目标销量的概率提升多少？预算有明码标价。</a:t>
             </a:r>
             <a:endParaRPr lang="en-US" altLang="zh-CN" sz="1600" dirty="0">
               <a:solidFill>
@@ -17097,12 +17385,21 @@
                 </a:solidFill>
                 <a:latin typeface="+mn-ea"/>
               </a:rPr>
-              <a:t>上市后得到真实数据，设定</a:t>
-            </a:r>
-            <a:r>
-              <a:rPr lang="en-US" altLang="zh-CN" sz="1600" dirty="0">
+              <a:t>上市后得到真实数据，</a:t>
+            </a:r>
+            <a:r>
+              <a:rPr lang="zh-CN" altLang="en-US" sz="1600" b="1" dirty="0">
                 <a:solidFill>
-                  <a:srgbClr val="000000"/>
+                  <a:schemeClr val="accent1"/>
+                </a:solidFill>
+                <a:latin typeface="+mn-ea"/>
+              </a:rPr>
+              <a:t>设定</a:t>
+            </a:r>
+            <a:r>
+              <a:rPr lang="en-US" altLang="zh-CN" sz="1600" b="1" dirty="0">
+                <a:solidFill>
+                  <a:schemeClr val="accent1"/>
                 </a:solidFill>
                 <a:latin typeface="+mn-ea"/>
               </a:rPr>
@@ -17143,7 +17440,25 @@
                 </a:solidFill>
                 <a:latin typeface="+mn-ea"/>
               </a:rPr>
-              <a:t>后面的讨论都是“我们怎么把曲线往右推？”</a:t>
+              <a:t>后面的讨论都是“</a:t>
+            </a:r>
+            <a:r>
+              <a:rPr lang="zh-CN" altLang="en-US" sz="1600" b="1" dirty="0">
+                <a:solidFill>
+                  <a:schemeClr val="accent1"/>
+                </a:solidFill>
+                <a:latin typeface="+mn-ea"/>
+              </a:rPr>
+              <a:t>我们怎么把曲线往右推？</a:t>
+            </a:r>
+            <a:r>
+              <a:rPr lang="zh-CN" altLang="en-US" sz="1600" dirty="0">
+                <a:solidFill>
+                  <a:srgbClr val="000000"/>
+                </a:solidFill>
+                <a:latin typeface="+mn-ea"/>
+              </a:rPr>
+              <a:t>”</a:t>
             </a:r>
             <a:endParaRPr sz="1600" dirty="0">
               <a:solidFill>
@@ -17168,7 +17483,7 @@
         </p:nvGrpSpPr>
         <p:grpSpPr>
           <a:xfrm>
-            <a:off x="2184906" y="1169126"/>
+            <a:off x="2184906" y="1149248"/>
             <a:ext cx="7716142" cy="3288696"/>
             <a:chOff x="6121090" y="927011"/>
             <a:chExt cx="5708508" cy="2577315"/>
@@ -17187,7 +17502,7 @@
             <p:nvPr>
               <p:extLst>
                 <p:ext uri="{D42A27DB-BD31-4B8C-83A1-F6EECF244321}">
-                  <p14:modId xmlns:p14="http://schemas.microsoft.com/office/powerpoint/2010/main" val="2796917131"/>
+                  <p14:modId xmlns:p14="http://schemas.microsoft.com/office/powerpoint/2010/main" val="2279127786"/>
                 </p:ext>
               </p:extLst>
             </p:nvPr>
@@ -17518,7 +17833,7 @@
 </p:sld>
 </file>
 
-<file path=ppt/slides/slide4.xml><?xml version="1.0" encoding="utf-8"?>
+<file path=ppt/slides/slide5.xml><?xml version="1.0" encoding="utf-8"?>
 <p:sld xmlns:a="http://schemas.openxmlformats.org/drawingml/2006/main" xmlns:r="http://schemas.openxmlformats.org/officeDocument/2006/relationships" xmlns:p="http://schemas.openxmlformats.org/presentationml/2006/main">
   <p:cSld>
     <p:spTree>
@@ -18454,7 +18769,7 @@
         </p:nvGrpSpPr>
         <p:grpSpPr>
           <a:xfrm>
-            <a:off x="283579" y="3659820"/>
+            <a:off x="283579" y="3652877"/>
             <a:ext cx="5760000" cy="2315603"/>
             <a:chOff x="361091" y="3306643"/>
             <a:chExt cx="5760000" cy="2315603"/>
@@ -18969,16 +19284,749 @@
 </p:sld>
 </file>
 
+<file path=ppt/slides/slide6.xml><?xml version="1.0" encoding="utf-8"?>
+<p:sld xmlns:a="http://schemas.openxmlformats.org/drawingml/2006/main" xmlns:r="http://schemas.openxmlformats.org/officeDocument/2006/relationships" xmlns:p="http://schemas.openxmlformats.org/presentationml/2006/main">
+  <p:cSld>
+    <p:spTree>
+      <p:nvGrpSpPr>
+        <p:cNvPr id="1" name=""/>
+        <p:cNvGrpSpPr/>
+        <p:nvPr/>
+      </p:nvGrpSpPr>
+      <p:grpSpPr>
+        <a:xfrm>
+          <a:off x="0" y="0"/>
+          <a:ext cx="0" cy="0"/>
+          <a:chOff x="0" y="0"/>
+          <a:chExt cx="0" cy="0"/>
+        </a:xfrm>
+      </p:grpSpPr>
+      <p:graphicFrame>
+        <p:nvGraphicFramePr>
+          <p:cNvPr id="3" name="表格 2">
+            <a:extLst>
+              <a:ext uri="{FF2B5EF4-FFF2-40B4-BE49-F238E27FC236}">
+                <a16:creationId xmlns:a16="http://schemas.microsoft.com/office/drawing/2014/main" id="{F2EF963A-634B-7D18-34FD-DF74091B5E62}"/>
+              </a:ext>
+            </a:extLst>
+          </p:cNvPr>
+          <p:cNvGraphicFramePr>
+            <a:graphicFrameLocks noGrp="1"/>
+          </p:cNvGraphicFramePr>
+          <p:nvPr>
+            <p:extLst>
+              <p:ext uri="{D42A27DB-BD31-4B8C-83A1-F6EECF244321}">
+                <p14:modId xmlns:p14="http://schemas.microsoft.com/office/powerpoint/2010/main" val="1964182016"/>
+              </p:ext>
+            </p:extLst>
+          </p:nvPr>
+        </p:nvGraphicFramePr>
+        <p:xfrm>
+          <a:off x="838200" y="2981570"/>
+          <a:ext cx="6180273" cy="1483360"/>
+        </p:xfrm>
+        <a:graphic>
+          <a:graphicData uri="http://schemas.openxmlformats.org/drawingml/2006/table">
+            <a:tbl>
+              <a:tblPr>
+                <a:tableStyleId>{5C22544A-7EE6-4342-B048-85BDC9FD1C3A}</a:tableStyleId>
+              </a:tblPr>
+              <a:tblGrid>
+                <a:gridCol w="2622140">
+                  <a:extLst>
+                    <a:ext uri="{9D8B030D-6E8A-4147-A177-3AD203B41FA5}">
+                      <a16:colId xmlns:a16="http://schemas.microsoft.com/office/drawing/2014/main" val="2308521187"/>
+                    </a:ext>
+                  </a:extLst>
+                </a:gridCol>
+                <a:gridCol w="3558133">
+                  <a:extLst>
+                    <a:ext uri="{9D8B030D-6E8A-4147-A177-3AD203B41FA5}">
+                      <a16:colId xmlns:a16="http://schemas.microsoft.com/office/drawing/2014/main" val="2757966043"/>
+                    </a:ext>
+                  </a:extLst>
+                </a:gridCol>
+              </a:tblGrid>
+              <a:tr h="370840">
+                <a:tc>
+                  <a:txBody>
+                    <a:bodyPr/>
+                    <a:lstStyle/>
+                    <a:p>
+                      <a:r>
+                        <a:rPr lang="en-US" altLang="zh-CN" sz="1200" dirty="0">
+                          <a:latin typeface="+mn-ea"/>
+                          <a:ea typeface="+mn-ea"/>
+                        </a:rPr>
+                        <a:t>6</a:t>
+                      </a:r>
+                      <a:r>
+                        <a:rPr lang="zh-CN" altLang="en-US" sz="1200" dirty="0">
+                          <a:latin typeface="+mn-ea"/>
+                          <a:ea typeface="+mn-ea"/>
+                        </a:rPr>
+                        <a:t>个月销售费用预算</a:t>
+                      </a:r>
+                      <a:r>
+                        <a:rPr lang="en-US" altLang="zh-CN" sz="1200" b="1" dirty="0">
+                          <a:latin typeface="+mn-ea"/>
+                          <a:ea typeface="+mn-ea"/>
+                        </a:rPr>
+                        <a:t>150</a:t>
+                      </a:r>
+                      <a:r>
+                        <a:rPr lang="zh-CN" altLang="en-US" sz="1200" b="1" dirty="0">
+                          <a:latin typeface="+mn-ea"/>
+                          <a:ea typeface="+mn-ea"/>
+                        </a:rPr>
+                        <a:t>万</a:t>
+                      </a:r>
+                    </a:p>
+                  </a:txBody>
+                  <a:tcPr anchor="ctr"/>
+                </a:tc>
+                <a:tc>
+                  <a:txBody>
+                    <a:bodyPr/>
+                    <a:lstStyle/>
+                    <a:p>
+                      <a:r>
+                        <a:rPr lang="en-US" altLang="zh-CN" sz="1200">
+                          <a:latin typeface="+mn-ea"/>
+                          <a:ea typeface="+mn-ea"/>
+                        </a:rPr>
+                        <a:t>Normal</a:t>
+                      </a:r>
+                      <a:r>
+                        <a:rPr lang="zh-CN" altLang="en-US" sz="1200">
+                          <a:latin typeface="+mn-ea"/>
+                          <a:ea typeface="+mn-ea"/>
+                        </a:rPr>
+                        <a:t>场景，销售费用</a:t>
+                      </a:r>
+                      <a:r>
+                        <a:rPr lang="en-US" altLang="zh-CN" sz="1200">
+                          <a:latin typeface="+mn-ea"/>
+                          <a:ea typeface="+mn-ea"/>
+                        </a:rPr>
+                        <a:t>30%</a:t>
+                      </a:r>
+                      <a:r>
+                        <a:rPr lang="zh-CN" altLang="en-US" sz="1200">
+                          <a:latin typeface="+mn-ea"/>
+                          <a:ea typeface="+mn-ea"/>
+                        </a:rPr>
+                        <a:t>的八成</a:t>
+                      </a:r>
+                    </a:p>
+                  </a:txBody>
+                  <a:tcPr anchor="ctr"/>
+                </a:tc>
+                <a:extLst>
+                  <a:ext uri="{0D108BD9-81ED-4DB2-BD59-A6C34878D82A}">
+                    <a16:rowId xmlns:a16="http://schemas.microsoft.com/office/drawing/2014/main" val="672152222"/>
+                  </a:ext>
+                </a:extLst>
+              </a:tr>
+              <a:tr h="370840">
+                <a:tc>
+                  <a:txBody>
+                    <a:bodyPr/>
+                    <a:lstStyle/>
+                    <a:p>
+                      <a:r>
+                        <a:rPr lang="en-US" altLang="zh-CN" sz="1200">
+                          <a:latin typeface="+mn-ea"/>
+                          <a:ea typeface="+mn-ea"/>
+                        </a:rPr>
+                        <a:t>÷ CPM 45 = </a:t>
+                      </a:r>
+                      <a:r>
+                        <a:rPr lang="en-US" altLang="zh-CN" sz="1200" b="1">
+                          <a:latin typeface="+mn-ea"/>
+                          <a:ea typeface="+mn-ea"/>
+                        </a:rPr>
+                        <a:t>3327</a:t>
+                      </a:r>
+                      <a:r>
+                        <a:rPr lang="zh-CN" altLang="en-US" sz="1200" b="1">
+                          <a:latin typeface="+mn-ea"/>
+                          <a:ea typeface="+mn-ea"/>
+                        </a:rPr>
+                        <a:t>万次曝光</a:t>
+                      </a:r>
+                    </a:p>
+                  </a:txBody>
+                  <a:tcPr anchor="ctr"/>
+                </a:tc>
+                <a:tc>
+                  <a:txBody>
+                    <a:bodyPr/>
+                    <a:lstStyle/>
+                    <a:p>
+                      <a:r>
+                        <a:rPr lang="zh-CN" altLang="en-US" sz="1200" dirty="0">
+                          <a:latin typeface="+mn-ea"/>
+                          <a:ea typeface="+mn-ea"/>
+                        </a:rPr>
+                        <a:t>极印约</a:t>
+                      </a:r>
+                      <a:r>
+                        <a:rPr lang="en-US" altLang="zh-CN" sz="1200" dirty="0">
+                          <a:latin typeface="+mn-ea"/>
+                          <a:ea typeface="+mn-ea"/>
+                        </a:rPr>
+                        <a:t>37.6</a:t>
+                      </a:r>
+                      <a:r>
+                        <a:rPr lang="zh-CN" altLang="en-US" sz="1200" dirty="0">
+                          <a:latin typeface="+mn-ea"/>
+                          <a:ea typeface="+mn-ea"/>
+                        </a:rPr>
+                        <a:t>（站外）</a:t>
+                      </a:r>
+                      <a:r>
+                        <a:rPr lang="en-US" altLang="zh-CN" sz="1200" dirty="0">
+                          <a:latin typeface="+mn-ea"/>
+                          <a:ea typeface="+mn-ea"/>
+                        </a:rPr>
+                        <a:t>/ 45.2</a:t>
+                      </a:r>
+                      <a:r>
+                        <a:rPr lang="zh-CN" altLang="en-US" sz="1200" dirty="0">
+                          <a:latin typeface="+mn-ea"/>
+                          <a:ea typeface="+mn-ea"/>
+                        </a:rPr>
+                        <a:t>（站内）</a:t>
+                      </a:r>
+                    </a:p>
+                  </a:txBody>
+                  <a:tcPr anchor="ctr"/>
+                </a:tc>
+                <a:extLst>
+                  <a:ext uri="{0D108BD9-81ED-4DB2-BD59-A6C34878D82A}">
+                    <a16:rowId xmlns:a16="http://schemas.microsoft.com/office/drawing/2014/main" val="1102920732"/>
+                  </a:ext>
+                </a:extLst>
+              </a:tr>
+              <a:tr h="370840">
+                <a:tc>
+                  <a:txBody>
+                    <a:bodyPr/>
+                    <a:lstStyle/>
+                    <a:p>
+                      <a:r>
+                        <a:rPr lang="en-US" altLang="zh-CN" sz="1200">
+                          <a:latin typeface="+mn-ea"/>
+                          <a:ea typeface="+mn-ea"/>
+                        </a:rPr>
+                        <a:t>* CTR 2.3% = </a:t>
+                      </a:r>
+                      <a:r>
+                        <a:rPr lang="en-US" altLang="zh-CN" sz="1200" b="1">
+                          <a:latin typeface="+mn-ea"/>
+                          <a:ea typeface="+mn-ea"/>
+                        </a:rPr>
+                        <a:t>77</a:t>
+                      </a:r>
+                      <a:r>
+                        <a:rPr lang="zh-CN" altLang="en-US" sz="1200" b="1">
+                          <a:latin typeface="+mn-ea"/>
+                          <a:ea typeface="+mn-ea"/>
+                        </a:rPr>
+                        <a:t>万次点击</a:t>
+                      </a:r>
+                    </a:p>
+                  </a:txBody>
+                  <a:tcPr anchor="ctr"/>
+                </a:tc>
+                <a:tc>
+                  <a:txBody>
+                    <a:bodyPr/>
+                    <a:lstStyle/>
+                    <a:p>
+                      <a:r>
+                        <a:rPr lang="en-US" altLang="zh-CN" sz="1200" dirty="0">
+                          <a:latin typeface="+mn-ea"/>
+                          <a:ea typeface="+mn-ea"/>
+                        </a:rPr>
+                        <a:t>S1</a:t>
+                      </a:r>
+                      <a:r>
+                        <a:rPr lang="zh-CN" altLang="en-US" sz="1200" dirty="0">
+                          <a:latin typeface="+mn-ea"/>
+                          <a:ea typeface="+mn-ea"/>
+                        </a:rPr>
+                        <a:t>实测为</a:t>
+                      </a:r>
+                      <a:r>
+                        <a:rPr lang="en-US" altLang="zh-CN" sz="1200" dirty="0">
+                          <a:latin typeface="+mn-ea"/>
+                          <a:ea typeface="+mn-ea"/>
+                        </a:rPr>
+                        <a:t>2.14%</a:t>
+                      </a:r>
+                      <a:endParaRPr lang="zh-CN" altLang="en-US" sz="1200" dirty="0">
+                        <a:latin typeface="+mn-ea"/>
+                        <a:ea typeface="+mn-ea"/>
+                      </a:endParaRPr>
+                    </a:p>
+                  </a:txBody>
+                  <a:tcPr anchor="ctr"/>
+                </a:tc>
+                <a:extLst>
+                  <a:ext uri="{0D108BD9-81ED-4DB2-BD59-A6C34878D82A}">
+                    <a16:rowId xmlns:a16="http://schemas.microsoft.com/office/drawing/2014/main" val="1794381956"/>
+                  </a:ext>
+                </a:extLst>
+              </a:tr>
+              <a:tr h="370840">
+                <a:tc>
+                  <a:txBody>
+                    <a:bodyPr/>
+                    <a:lstStyle/>
+                    <a:p>
+                      <a:r>
+                        <a:rPr lang="en-US" altLang="zh-CN" sz="1200">
+                          <a:latin typeface="+mn-ea"/>
+                          <a:ea typeface="+mn-ea"/>
+                        </a:rPr>
+                        <a:t>* CVR 1.4% = </a:t>
+                      </a:r>
+                      <a:r>
+                        <a:rPr lang="en-US" altLang="zh-CN" sz="1200" b="1">
+                          <a:latin typeface="+mn-ea"/>
+                          <a:ea typeface="+mn-ea"/>
+                        </a:rPr>
+                        <a:t>1.07</a:t>
+                      </a:r>
+                      <a:r>
+                        <a:rPr lang="zh-CN" altLang="en-US" sz="1200" b="1">
+                          <a:latin typeface="+mn-ea"/>
+                          <a:ea typeface="+mn-ea"/>
+                        </a:rPr>
+                        <a:t>万销量（</a:t>
+                      </a:r>
+                      <a:r>
+                        <a:rPr lang="en-US" altLang="zh-CN" sz="1200" b="1">
+                          <a:latin typeface="+mn-ea"/>
+                          <a:ea typeface="+mn-ea"/>
+                        </a:rPr>
+                        <a:t>H1</a:t>
+                      </a:r>
+                      <a:r>
+                        <a:rPr lang="zh-CN" altLang="en-US" sz="1200" b="1">
+                          <a:latin typeface="+mn-ea"/>
+                          <a:ea typeface="+mn-ea"/>
+                        </a:rPr>
+                        <a:t>）</a:t>
+                      </a:r>
+                    </a:p>
+                  </a:txBody>
+                  <a:tcPr anchor="ctr"/>
+                </a:tc>
+                <a:tc>
+                  <a:txBody>
+                    <a:bodyPr/>
+                    <a:lstStyle/>
+                    <a:p>
+                      <a:r>
+                        <a:rPr lang="en-US" altLang="zh-CN" sz="1200" dirty="0">
+                          <a:latin typeface="+mn-ea"/>
+                          <a:ea typeface="+mn-ea"/>
+                        </a:rPr>
+                        <a:t>S1</a:t>
+                      </a:r>
+                      <a:r>
+                        <a:rPr lang="zh-CN" altLang="en-US" sz="1200" dirty="0">
+                          <a:latin typeface="+mn-ea"/>
+                          <a:ea typeface="+mn-ea"/>
+                        </a:rPr>
+                        <a:t>实测</a:t>
+                      </a:r>
+                      <a:r>
+                        <a:rPr lang="en-US" altLang="zh-CN" sz="1200" dirty="0">
+                          <a:latin typeface="+mn-ea"/>
+                          <a:ea typeface="+mn-ea"/>
+                        </a:rPr>
+                        <a:t>0.98%</a:t>
+                      </a:r>
+                      <a:r>
+                        <a:rPr lang="zh-CN" altLang="en-US" sz="1200" dirty="0">
+                          <a:latin typeface="+mn-ea"/>
+                          <a:ea typeface="+mn-ea"/>
+                        </a:rPr>
+                        <a:t>，</a:t>
+                      </a:r>
+                      <a:r>
+                        <a:rPr lang="en-US" altLang="zh-CN" sz="1200" dirty="0">
+                          <a:latin typeface="+mn-ea"/>
+                          <a:ea typeface="+mn-ea"/>
+                        </a:rPr>
+                        <a:t>N2 3.27%</a:t>
+                      </a:r>
+                      <a:r>
+                        <a:rPr lang="zh-CN" altLang="en-US" sz="1200" dirty="0">
+                          <a:latin typeface="+mn-ea"/>
+                          <a:ea typeface="+mn-ea"/>
+                        </a:rPr>
+                        <a:t>印证价位弹性。</a:t>
+                      </a:r>
+                      <a:endParaRPr lang="en-US" altLang="zh-CN" sz="1200" dirty="0">
+                        <a:latin typeface="+mn-ea"/>
+                        <a:ea typeface="+mn-ea"/>
+                      </a:endParaRPr>
+                    </a:p>
+                  </a:txBody>
+                  <a:tcPr anchor="ctr"/>
+                </a:tc>
+                <a:extLst>
+                  <a:ext uri="{0D108BD9-81ED-4DB2-BD59-A6C34878D82A}">
+                    <a16:rowId xmlns:a16="http://schemas.microsoft.com/office/drawing/2014/main" val="272319136"/>
+                  </a:ext>
+                </a:extLst>
+              </a:tr>
+            </a:tbl>
+          </a:graphicData>
+        </a:graphic>
+      </p:graphicFrame>
+      <p:sp>
+        <p:nvSpPr>
+          <p:cNvPr id="5" name="标题 1">
+            <a:extLst>
+              <a:ext uri="{FF2B5EF4-FFF2-40B4-BE49-F238E27FC236}">
+                <a16:creationId xmlns:a16="http://schemas.microsoft.com/office/drawing/2014/main" id="{FF7C4841-5E1B-9677-9B39-4F903BF8CB9B}"/>
+              </a:ext>
+            </a:extLst>
+          </p:cNvPr>
+          <p:cNvSpPr txBox="1">
+            <a:spLocks/>
+          </p:cNvSpPr>
+          <p:nvPr/>
+        </p:nvSpPr>
+        <p:spPr>
+          <a:xfrm>
+            <a:off x="838200" y="510908"/>
+            <a:ext cx="2616422" cy="424732"/>
+          </a:xfrm>
+          <a:prstGeom prst="rect">
+            <a:avLst/>
+          </a:prstGeom>
+        </p:spPr>
+        <p:txBody>
+          <a:bodyPr wrap="none">
+            <a:spAutoFit/>
+          </a:bodyPr>
+          <a:lstStyle>
+            <a:lvl1pPr algn="l" defTabSz="914400" rtl="0" eaLnBrk="1" latinLnBrk="0" hangingPunct="1">
+              <a:lnSpc>
+                <a:spcPct val="90000"/>
+              </a:lnSpc>
+              <a:spcBef>
+                <a:spcPct val="0"/>
+              </a:spcBef>
+              <a:buNone/>
+              <a:defRPr sz="3200" kern="1200">
+                <a:solidFill>
+                  <a:schemeClr val="tx1"/>
+                </a:solidFill>
+                <a:latin typeface="Microsoft YaHei UI" panose="020B0503020204020204" pitchFamily="34" charset="-122"/>
+                <a:ea typeface="Microsoft YaHei UI" panose="020B0503020204020204" pitchFamily="34" charset="-122"/>
+                <a:cs typeface="+mj-cs"/>
+              </a:defRPr>
+            </a:lvl1pPr>
+          </a:lstStyle>
+          <a:p>
+            <a:r>
+              <a:rPr lang="zh-CN" altLang="en-US" sz="2400" dirty="0">
+                <a:latin typeface="+mn-ea"/>
+                <a:ea typeface="+mn-ea"/>
+                <a:cs typeface="+mn-ea"/>
+                <a:sym typeface="+mn-lt"/>
+              </a:rPr>
+              <a:t>用实际数据反推 </a:t>
+            </a:r>
+            <a:r>
+              <a:rPr lang="en-US" altLang="zh-CN" sz="2400" dirty="0">
+                <a:latin typeface="+mn-ea"/>
+                <a:ea typeface="+mn-ea"/>
+                <a:cs typeface="+mn-ea"/>
+                <a:sym typeface="+mn-lt"/>
+              </a:rPr>
+              <a:t>p</a:t>
+            </a:r>
+            <a:endParaRPr lang="zh-CN" altLang="en-US" sz="2400" dirty="0">
+              <a:latin typeface="+mn-ea"/>
+              <a:ea typeface="+mn-ea"/>
+              <a:cs typeface="+mn-ea"/>
+              <a:sym typeface="+mn-lt"/>
+            </a:endParaRPr>
+          </a:p>
+        </p:txBody>
+      </p:sp>
+      <p:sp>
+        <p:nvSpPr>
+          <p:cNvPr id="7" name="TextBox 7">
+            <a:extLst>
+              <a:ext uri="{FF2B5EF4-FFF2-40B4-BE49-F238E27FC236}">
+                <a16:creationId xmlns:a16="http://schemas.microsoft.com/office/drawing/2014/main" id="{E3D0088C-A400-C82B-307E-CA4327FD2C54}"/>
+              </a:ext>
+            </a:extLst>
+          </p:cNvPr>
+          <p:cNvSpPr txBox="1"/>
+          <p:nvPr>
+            <p:custDataLst>
+              <p:tags r:id="rId1"/>
+            </p:custDataLst>
+          </p:nvPr>
+        </p:nvSpPr>
+        <p:spPr>
+          <a:xfrm>
+            <a:off x="838200" y="1388577"/>
+            <a:ext cx="3599999" cy="1140056"/>
+          </a:xfrm>
+          <a:prstGeom prst="rect">
+            <a:avLst/>
+          </a:prstGeom>
+          <a:noFill/>
+        </p:spPr>
+        <p:txBody>
+          <a:bodyPr wrap="square">
+            <a:spAutoFit/>
+          </a:bodyPr>
+          <a:lstStyle/>
+          <a:p>
+            <a:pPr algn="l">
+              <a:lnSpc>
+                <a:spcPts val="2100"/>
+              </a:lnSpc>
+              <a:defRPr sz="1400" b="0">
+                <a:solidFill>
+                  <a:srgbClr val="CCCCCC"/>
+                </a:solidFill>
+                <a:latin typeface="微软雅黑" panose="020B0503020204020204" charset="-122"/>
+              </a:defRPr>
+            </a:pPr>
+            <a:r>
+              <a:rPr lang="zh-CN" altLang="en-US" sz="1200" dirty="0">
+                <a:solidFill>
+                  <a:srgbClr val="000000"/>
+                </a:solidFill>
+                <a:latin typeface="+mn-ea"/>
+              </a:rPr>
+              <a:t>三个参数画一条</a:t>
+            </a:r>
+            <a:r>
+              <a:rPr lang="en-US" altLang="zh-CN" sz="1200" dirty="0">
+                <a:solidFill>
+                  <a:srgbClr val="000000"/>
+                </a:solidFill>
+                <a:latin typeface="+mn-ea"/>
+              </a:rPr>
+              <a:t>S</a:t>
+            </a:r>
+            <a:r>
+              <a:rPr lang="zh-CN" altLang="en-US" sz="1200" dirty="0">
+                <a:solidFill>
+                  <a:srgbClr val="000000"/>
+                </a:solidFill>
+                <a:latin typeface="+mn-ea"/>
+              </a:rPr>
+              <a:t>曲线。</a:t>
+            </a:r>
+            <a:r>
+              <a:rPr lang="en-US" altLang="zh-CN" sz="1200" dirty="0">
+                <a:solidFill>
+                  <a:srgbClr val="000000"/>
+                </a:solidFill>
+                <a:latin typeface="+mn-ea"/>
+              </a:rPr>
+              <a:t>m</a:t>
+            </a:r>
+            <a:r>
+              <a:rPr lang="zh-CN" altLang="en-US" sz="1200" dirty="0">
+                <a:solidFill>
+                  <a:srgbClr val="000000"/>
+                </a:solidFill>
+                <a:latin typeface="+mn-ea"/>
+              </a:rPr>
+              <a:t>是曲线，</a:t>
+            </a:r>
+            <a:r>
+              <a:rPr lang="en-US" altLang="zh-CN" sz="1200" b="1" dirty="0">
+                <a:solidFill>
+                  <a:schemeClr val="accent1"/>
+                </a:solidFill>
+                <a:latin typeface="+mn-ea"/>
+              </a:rPr>
+              <a:t>p</a:t>
+            </a:r>
+            <a:r>
+              <a:rPr lang="zh-CN" altLang="en-US" sz="1200" b="1" dirty="0">
+                <a:solidFill>
+                  <a:schemeClr val="accent1"/>
+                </a:solidFill>
+                <a:latin typeface="+mn-ea"/>
+              </a:rPr>
+              <a:t>是投放驱动的启动陡度</a:t>
+            </a:r>
+            <a:r>
+              <a:rPr lang="zh-CN" altLang="en-US" sz="1200" dirty="0">
+                <a:solidFill>
+                  <a:srgbClr val="000000"/>
+                </a:solidFill>
+                <a:latin typeface="+mn-ea"/>
+              </a:rPr>
+              <a:t>，</a:t>
+            </a:r>
+            <a:r>
+              <a:rPr lang="en-US" altLang="zh-CN" sz="1200" dirty="0">
+                <a:solidFill>
+                  <a:srgbClr val="000000"/>
+                </a:solidFill>
+                <a:latin typeface="+mn-ea"/>
+              </a:rPr>
+              <a:t>q</a:t>
+            </a:r>
+            <a:r>
+              <a:rPr lang="zh-CN" altLang="en-US" sz="1200" dirty="0">
+                <a:solidFill>
+                  <a:srgbClr val="000000"/>
+                </a:solidFill>
+                <a:latin typeface="+mn-ea"/>
+              </a:rPr>
+              <a:t>是口碑驱动的起飞斜率。</a:t>
+            </a:r>
+            <a:endParaRPr lang="en-US" altLang="zh-CN" sz="1200" dirty="0">
+              <a:solidFill>
+                <a:srgbClr val="000000"/>
+              </a:solidFill>
+              <a:latin typeface="+mn-ea"/>
+            </a:endParaRPr>
+          </a:p>
+          <a:p>
+            <a:pPr algn="l">
+              <a:lnSpc>
+                <a:spcPts val="2100"/>
+              </a:lnSpc>
+              <a:defRPr sz="1400" b="0">
+                <a:solidFill>
+                  <a:srgbClr val="CCCCCC"/>
+                </a:solidFill>
+                <a:latin typeface="微软雅黑" panose="020B0503020204020204" charset="-122"/>
+              </a:defRPr>
+            </a:pPr>
+            <a:endParaRPr lang="en-US" altLang="zh-CN" sz="1200" dirty="0">
+              <a:solidFill>
+                <a:srgbClr val="000000"/>
+              </a:solidFill>
+              <a:latin typeface="+mn-ea"/>
+            </a:endParaRPr>
+          </a:p>
+          <a:p>
+            <a:pPr algn="l">
+              <a:lnSpc>
+                <a:spcPts val="2100"/>
+              </a:lnSpc>
+              <a:defRPr sz="1400" b="0">
+                <a:solidFill>
+                  <a:srgbClr val="CCCCCC"/>
+                </a:solidFill>
+                <a:latin typeface="微软雅黑" panose="020B0503020204020204" charset="-122"/>
+              </a:defRPr>
+            </a:pPr>
+            <a:r>
+              <a:rPr lang="zh-CN" altLang="en-US" sz="1200" dirty="0">
+                <a:solidFill>
+                  <a:srgbClr val="000000"/>
+                </a:solidFill>
+                <a:latin typeface="+mn-ea"/>
+              </a:rPr>
+              <a:t>其中</a:t>
+            </a:r>
+            <a:r>
+              <a:rPr lang="en-US" altLang="zh-CN" sz="1200" dirty="0">
+                <a:solidFill>
+                  <a:srgbClr val="000000"/>
+                </a:solidFill>
+                <a:latin typeface="+mn-ea"/>
+              </a:rPr>
+              <a:t>p</a:t>
+            </a:r>
+            <a:r>
+              <a:rPr lang="zh-CN" altLang="en-US" sz="1200" dirty="0">
+                <a:solidFill>
+                  <a:srgbClr val="000000"/>
+                </a:solidFill>
+                <a:latin typeface="+mn-ea"/>
+              </a:rPr>
+              <a:t>是实际投流漏斗反解出来的，就是</a:t>
+            </a:r>
+            <a:r>
+              <a:rPr lang="en-US" altLang="zh-CN" sz="1200" dirty="0">
+                <a:solidFill>
+                  <a:srgbClr val="000000"/>
+                </a:solidFill>
+                <a:latin typeface="+mn-ea"/>
+              </a:rPr>
+              <a:t>3+1</a:t>
+            </a:r>
+            <a:r>
+              <a:rPr lang="zh-CN" altLang="en-US" sz="1200" dirty="0">
+                <a:solidFill>
+                  <a:srgbClr val="000000"/>
+                </a:solidFill>
+                <a:latin typeface="+mn-ea"/>
+              </a:rPr>
+              <a:t>中的</a:t>
+            </a:r>
+            <a:r>
+              <a:rPr lang="en-US" altLang="zh-CN" sz="1200" dirty="0">
+                <a:solidFill>
+                  <a:srgbClr val="000000"/>
+                </a:solidFill>
+                <a:latin typeface="+mn-ea"/>
+              </a:rPr>
+              <a:t>1</a:t>
+            </a:r>
+          </a:p>
+        </p:txBody>
+      </p:sp>
+    </p:spTree>
+    <p:extLst>
+      <p:ext uri="{BB962C8B-B14F-4D97-AF65-F5344CB8AC3E}">
+        <p14:creationId xmlns:p14="http://schemas.microsoft.com/office/powerpoint/2010/main" val="2072945039"/>
+      </p:ext>
+    </p:extLst>
+  </p:cSld>
+  <p:clrMapOvr>
+    <a:masterClrMapping/>
+  </p:clrMapOvr>
+</p:sld>
+</file>
+
 <file path=ppt/tags/tag1.xml><?xml version="1.0" encoding="utf-8"?>
 <p:tagLst xmlns:a="http://schemas.openxmlformats.org/drawingml/2006/main" xmlns:r="http://schemas.openxmlformats.org/officeDocument/2006/relationships" xmlns:p="http://schemas.openxmlformats.org/presentationml/2006/main">
-  <p:tag name="TABLE_ENDDRAG_ORIGIN_RECT" val="819*199"/>
-  <p:tag name="TABLE_ENDDRAG_RECT" val="66*100*819*199"/>
+  <p:tag name="KSO_WM_DIAGRAM_VIRTUALLY_FRAME" val="{&quot;height&quot;:201.6,&quot;left&quot;:57.6,&quot;top&quot;:100.8,&quot;width&quot;:863.9999212598425}"/>
+</p:tagLst>
+</file>
+
+<file path=ppt/tags/tag10.xml><?xml version="1.0" encoding="utf-8"?>
+<p:tagLst xmlns:a="http://schemas.openxmlformats.org/drawingml/2006/main" xmlns:r="http://schemas.openxmlformats.org/officeDocument/2006/relationships" xmlns:p="http://schemas.openxmlformats.org/presentationml/2006/main">
+  <p:tag name="KSO_WM_DIAGRAM_VIRTUALLY_FRAME" val="{&quot;height&quot;:201.6,&quot;left&quot;:57.6,&quot;top&quot;:100.8,&quot;width&quot;:863.9999212598425}"/>
+</p:tagLst>
+</file>
+
+<file path=ppt/tags/tag11.xml><?xml version="1.0" encoding="utf-8"?>
+<p:tagLst xmlns:a="http://schemas.openxmlformats.org/drawingml/2006/main" xmlns:r="http://schemas.openxmlformats.org/officeDocument/2006/relationships" xmlns:p="http://schemas.openxmlformats.org/presentationml/2006/main">
+  <p:tag name="KSO_WM_DIAGRAM_VIRTUALLY_FRAME" val="{&quot;height&quot;:201.6,&quot;left&quot;:57.6,&quot;top&quot;:100.8,&quot;width&quot;:863.9999212598425}"/>
 </p:tagLst>
 </file>
 
 <file path=ppt/tags/tag2.xml><?xml version="1.0" encoding="utf-8"?>
 <p:tagLst xmlns:a="http://schemas.openxmlformats.org/drawingml/2006/main" xmlns:r="http://schemas.openxmlformats.org/officeDocument/2006/relationships" xmlns:p="http://schemas.openxmlformats.org/presentationml/2006/main">
-  <p:tag name="KSO_WM_DIAGRAM_VIRTUALLY_FRAME" val="{&quot;height&quot;:201.6,&quot;left&quot;:57.6,&quot;top&quot;:100.8,&quot;width&quot;:863.9999212598425}"/>
+  <p:tag name="TABLE_ENDDRAG_ORIGIN_RECT" val="819*199"/>
+  <p:tag name="TABLE_ENDDRAG_RECT" val="66*100*819*199"/>
 </p:tagLst>
 </file>
 
@@ -19216,7 +20264,7 @@
     </a:fmtScheme>
     <a:extLst>
       <a:ext uri="{D81B5157-A7B6-4480-A006-42BB1BC3E7BB}">
-        <wpsdc:hlinkScheme xmlns="" xmlns:wpsdc="http://www.wps.cn/officeDocument/2017/drawingmlCustomData" underline="false"/>
+        <wpsdc:hlinkScheme xmlns:wpsdc="http://www.wps.cn/officeDocument/2017/drawingmlCustomData" xmlns="" underline="false"/>
       </a:ext>
     </a:extLst>
   </a:themeElements>
